--- a/data-eng/decks/w2d5s1.pptx
+++ b/data-eng/decks/w2d5s1.pptx
@@ -3100,7 +3100,7 @@
       <p:grpSpPr/>
       <p:sp>
         <p:nvSpPr>
-          <p:cNvPr id="2" name="Oval 1"/>
+          <p:cNvPr id="2" name="deckgen:decor"/>
           <p:cNvSpPr/>
           <p:nvPr/>
         </p:nvSpPr>
@@ -3130,7 +3130,7 @@
       </p:sp>
       <p:sp>
         <p:nvSpPr>
-          <p:cNvPr id="3" name="Oval 2"/>
+          <p:cNvPr id="3" name="deckgen:decor"/>
           <p:cNvSpPr/>
           <p:nvPr/>
         </p:nvSpPr>
@@ -3160,7 +3160,7 @@
       </p:sp>
       <p:sp>
         <p:nvSpPr>
-          <p:cNvPr id="4" name="Oval 3"/>
+          <p:cNvPr id="4" name="deckgen:decor"/>
           <p:cNvSpPr/>
           <p:nvPr/>
         </p:nvSpPr>
@@ -3190,7 +3190,7 @@
       </p:sp>
       <p:sp>
         <p:nvSpPr>
-          <p:cNvPr id="5" name="Rectangle 4"/>
+          <p:cNvPr id="5" name="deckgen:decor"/>
           <p:cNvSpPr/>
           <p:nvPr/>
         </p:nvSpPr>
@@ -3220,7 +3220,7 @@
       </p:sp>
       <p:sp>
         <p:nvSpPr>
-          <p:cNvPr id="6" name="Oval 5"/>
+          <p:cNvPr id="6" name="deckgen:decor"/>
           <p:cNvSpPr/>
           <p:nvPr/>
         </p:nvSpPr>
@@ -3250,7 +3250,7 @@
       </p:sp>
       <p:sp>
         <p:nvSpPr>
-          <p:cNvPr id="7" name="Oval 6"/>
+          <p:cNvPr id="7" name="deckgen:decor"/>
           <p:cNvSpPr/>
           <p:nvPr/>
         </p:nvSpPr>
@@ -3280,7 +3280,7 @@
       </p:sp>
       <p:sp>
         <p:nvSpPr>
-          <p:cNvPr id="8" name="Oval 7"/>
+          <p:cNvPr id="8" name="deckgen:decor"/>
           <p:cNvSpPr/>
           <p:nvPr/>
         </p:nvSpPr>
@@ -3310,7 +3310,7 @@
       </p:sp>
       <p:sp>
         <p:nvSpPr>
-          <p:cNvPr id="9" name="Oval 8"/>
+          <p:cNvPr id="9" name="deckgen:decor"/>
           <p:cNvSpPr/>
           <p:nvPr/>
         </p:nvSpPr>
@@ -3340,7 +3340,7 @@
       </p:sp>
       <p:sp>
         <p:nvSpPr>
-          <p:cNvPr id="10" name="Rectangle 9"/>
+          <p:cNvPr id="10" name="deckgen:decor"/>
           <p:cNvSpPr/>
           <p:nvPr/>
         </p:nvSpPr>
@@ -3600,7 +3600,7 @@
       <p:grpSpPr/>
       <p:sp>
         <p:nvSpPr>
-          <p:cNvPr id="2" name="Oval 1"/>
+          <p:cNvPr id="2" name="deckgen:decor"/>
           <p:cNvSpPr/>
           <p:nvPr/>
         </p:nvSpPr>
@@ -3630,7 +3630,7 @@
       </p:sp>
       <p:sp>
         <p:nvSpPr>
-          <p:cNvPr id="3" name="Oval 2"/>
+          <p:cNvPr id="3" name="deckgen:decor"/>
           <p:cNvSpPr/>
           <p:nvPr/>
         </p:nvSpPr>
@@ -3660,7 +3660,7 @@
       </p:sp>
       <p:sp>
         <p:nvSpPr>
-          <p:cNvPr id="4" name="Oval 3"/>
+          <p:cNvPr id="4" name="deckgen:decor"/>
           <p:cNvSpPr/>
           <p:nvPr/>
         </p:nvSpPr>
@@ -4662,7 +4662,7 @@
       <p:grpSpPr/>
       <p:sp>
         <p:nvSpPr>
-          <p:cNvPr id="2" name="Oval 1"/>
+          <p:cNvPr id="2" name="deckgen:decor"/>
           <p:cNvSpPr/>
           <p:nvPr/>
         </p:nvSpPr>
@@ -4692,7 +4692,7 @@
       </p:sp>
       <p:sp>
         <p:nvSpPr>
-          <p:cNvPr id="3" name="Oval 2"/>
+          <p:cNvPr id="3" name="deckgen:decor"/>
           <p:cNvSpPr/>
           <p:nvPr/>
         </p:nvSpPr>
@@ -5469,7 +5469,7 @@
       <p:grpSpPr/>
       <p:sp>
         <p:nvSpPr>
-          <p:cNvPr id="2" name="Oval 1"/>
+          <p:cNvPr id="2" name="deckgen:decor"/>
           <p:cNvSpPr/>
           <p:nvPr/>
         </p:nvSpPr>
@@ -5499,7 +5499,7 @@
       </p:sp>
       <p:sp>
         <p:nvSpPr>
-          <p:cNvPr id="3" name="Oval 2"/>
+          <p:cNvPr id="3" name="deckgen:decor"/>
           <p:cNvSpPr/>
           <p:nvPr/>
         </p:nvSpPr>
@@ -5529,7 +5529,7 @@
       </p:sp>
       <p:sp>
         <p:nvSpPr>
-          <p:cNvPr id="4" name="Oval 3"/>
+          <p:cNvPr id="4" name="deckgen:decor"/>
           <p:cNvSpPr/>
           <p:nvPr/>
         </p:nvSpPr>
@@ -6460,7 +6460,7 @@
       <p:grpSpPr/>
       <p:sp>
         <p:nvSpPr>
-          <p:cNvPr id="2" name="Oval 1"/>
+          <p:cNvPr id="2" name="deckgen:decor"/>
           <p:cNvSpPr/>
           <p:nvPr/>
         </p:nvSpPr>
@@ -6490,7 +6490,7 @@
       </p:sp>
       <p:sp>
         <p:nvSpPr>
-          <p:cNvPr id="3" name="Oval 2"/>
+          <p:cNvPr id="3" name="deckgen:decor"/>
           <p:cNvSpPr/>
           <p:nvPr/>
         </p:nvSpPr>
@@ -6520,7 +6520,7 @@
       </p:sp>
       <p:sp>
         <p:nvSpPr>
-          <p:cNvPr id="4" name="Oval 3"/>
+          <p:cNvPr id="4" name="deckgen:decor"/>
           <p:cNvSpPr/>
           <p:nvPr/>
         </p:nvSpPr>
@@ -7654,7 +7654,7 @@
       <p:grpSpPr/>
       <p:sp>
         <p:nvSpPr>
-          <p:cNvPr id="2" name="Oval 1"/>
+          <p:cNvPr id="2" name="deckgen:decor"/>
           <p:cNvSpPr/>
           <p:nvPr/>
         </p:nvSpPr>
@@ -7684,7 +7684,7 @@
       </p:sp>
       <p:sp>
         <p:nvSpPr>
-          <p:cNvPr id="3" name="Oval 2"/>
+          <p:cNvPr id="3" name="deckgen:decor"/>
           <p:cNvSpPr/>
           <p:nvPr/>
         </p:nvSpPr>
@@ -7714,7 +7714,7 @@
       </p:sp>
       <p:sp>
         <p:nvSpPr>
-          <p:cNvPr id="4" name="Oval 3"/>
+          <p:cNvPr id="4" name="deckgen:decor"/>
           <p:cNvSpPr/>
           <p:nvPr/>
         </p:nvSpPr>
@@ -9590,7 +9590,7 @@
       <p:grpSpPr/>
       <p:sp>
         <p:nvSpPr>
-          <p:cNvPr id="2" name="Oval 1"/>
+          <p:cNvPr id="2" name="deckgen:decor"/>
           <p:cNvSpPr/>
           <p:nvPr/>
         </p:nvSpPr>
@@ -9620,7 +9620,7 @@
       </p:sp>
       <p:sp>
         <p:nvSpPr>
-          <p:cNvPr id="3" name="Oval 2"/>
+          <p:cNvPr id="3" name="deckgen:decor"/>
           <p:cNvSpPr/>
           <p:nvPr/>
         </p:nvSpPr>
@@ -9650,7 +9650,7 @@
       </p:sp>
       <p:sp>
         <p:nvSpPr>
-          <p:cNvPr id="4" name="Oval 3"/>
+          <p:cNvPr id="4" name="deckgen:decor"/>
           <p:cNvSpPr/>
           <p:nvPr/>
         </p:nvSpPr>
@@ -10617,7 +10617,7 @@
       <p:grpSpPr/>
       <p:sp>
         <p:nvSpPr>
-          <p:cNvPr id="2" name="Oval 1"/>
+          <p:cNvPr id="2" name="deckgen:decor"/>
           <p:cNvSpPr/>
           <p:nvPr/>
         </p:nvSpPr>
@@ -10647,7 +10647,7 @@
       </p:sp>
       <p:sp>
         <p:nvSpPr>
-          <p:cNvPr id="3" name="Oval 2"/>
+          <p:cNvPr id="3" name="deckgen:decor"/>
           <p:cNvSpPr/>
           <p:nvPr/>
         </p:nvSpPr>
@@ -10677,7 +10677,7 @@
       </p:sp>
       <p:sp>
         <p:nvSpPr>
-          <p:cNvPr id="4" name="Oval 3"/>
+          <p:cNvPr id="4" name="deckgen:decor"/>
           <p:cNvSpPr/>
           <p:nvPr/>
         </p:nvSpPr>
@@ -11773,7 +11773,7 @@
       <p:grpSpPr/>
       <p:sp>
         <p:nvSpPr>
-          <p:cNvPr id="2" name="Oval 1"/>
+          <p:cNvPr id="2" name="deckgen:decor"/>
           <p:cNvSpPr/>
           <p:nvPr/>
         </p:nvSpPr>
@@ -11803,7 +11803,7 @@
       </p:sp>
       <p:sp>
         <p:nvSpPr>
-          <p:cNvPr id="3" name="Oval 2"/>
+          <p:cNvPr id="3" name="deckgen:decor"/>
           <p:cNvSpPr/>
           <p:nvPr/>
         </p:nvSpPr>
@@ -11833,7 +11833,7 @@
       </p:sp>
       <p:sp>
         <p:nvSpPr>
-          <p:cNvPr id="4" name="Oval 3"/>
+          <p:cNvPr id="4" name="deckgen:decor"/>
           <p:cNvSpPr/>
           <p:nvPr/>
         </p:nvSpPr>
@@ -13079,7 +13079,7 @@
       <p:grpSpPr/>
       <p:sp>
         <p:nvSpPr>
-          <p:cNvPr id="2" name="Oval 1"/>
+          <p:cNvPr id="2" name="deckgen:decor"/>
           <p:cNvSpPr/>
           <p:nvPr/>
         </p:nvSpPr>
@@ -13109,7 +13109,7 @@
       </p:sp>
       <p:sp>
         <p:nvSpPr>
-          <p:cNvPr id="3" name="Oval 2"/>
+          <p:cNvPr id="3" name="deckgen:decor"/>
           <p:cNvSpPr/>
           <p:nvPr/>
         </p:nvSpPr>
@@ -13139,7 +13139,7 @@
       </p:sp>
       <p:sp>
         <p:nvSpPr>
-          <p:cNvPr id="4" name="Oval 3"/>
+          <p:cNvPr id="4" name="deckgen:decor"/>
           <p:cNvSpPr/>
           <p:nvPr/>
         </p:nvSpPr>
@@ -14554,7 +14554,7 @@
       <p:grpSpPr/>
       <p:sp>
         <p:nvSpPr>
-          <p:cNvPr id="2" name="Oval 1"/>
+          <p:cNvPr id="2" name="deckgen:decor"/>
           <p:cNvSpPr/>
           <p:nvPr/>
         </p:nvSpPr>
@@ -14584,7 +14584,7 @@
       </p:sp>
       <p:sp>
         <p:nvSpPr>
-          <p:cNvPr id="3" name="Oval 2"/>
+          <p:cNvPr id="3" name="deckgen:decor"/>
           <p:cNvSpPr/>
           <p:nvPr/>
         </p:nvSpPr>
@@ -14614,7 +14614,7 @@
       </p:sp>
       <p:sp>
         <p:nvSpPr>
-          <p:cNvPr id="4" name="Oval 3"/>
+          <p:cNvPr id="4" name="deckgen:decor"/>
           <p:cNvSpPr/>
           <p:nvPr/>
         </p:nvSpPr>
